--- a/docs/submission/variants/RASTA_AI_SIH26002_TEAM17_V01_HOUSE.pptx
+++ b/docs/submission/variants/RASTA_AI_SIH26002_TEAM17_V01_HOUSE.pptx
@@ -6644,7 +6644,7 @@
                 </a:solidFill>
                 <a:latin typeface="Calibri"/>
               </a:rPr>
-              <a:t>NER corridors: mountain terrain · monsoon · landslides · floods · weak signal · stale evidence. </a:t>
+              <a:t>Monsoon · landslides · floods · official warnings · single-lane hill roads · no signal.  </a:t>
             </a:r>
             <a:r>
               <a:rPr sz="1150" b="1">
@@ -8217,7 +8217,7 @@
                 </a:solidFill>
                 <a:latin typeface="Calibri"/>
               </a:rPr>
-              <a:t>missing or stale evidence is marked UNKNOWN, never counted as safe, and the route goes to an authorised reviewer.</a:t>
+              <a:t>missing or stale evidence is marked UNKNOWN — never safe — and goes to an authorised reviewer.</a:t>
             </a:r>
           </a:p>
         </p:txBody>
@@ -10777,7 +10777,7 @@
                 </a:solidFill>
                 <a:latin typeface="Calibri"/>
               </a:rPr>
-              <a:t>Decision loop: conditions are re-scored every 60 s along the road ahead; a material change goes back through the policy, and a reroute is proposed to the manager — never applied silently.</a:t>
+              <a:t>Re-scored every 60 s on the road ahead. A reroute is proposed to the manager, never applied silently.</a:t>
             </a:r>
           </a:p>
         </p:txBody>
@@ -10916,7 +10916,7 @@
                 </a:solidFill>
                 <a:latin typeface="Calibri"/>
               </a:rPr>
-              <a:t>Manager console — React + TypeScript, manager accounts only · Driver app — React Native / Expo, Android; one login, server-decided role, offline trip package</a:t>
+              <a:t>Manager console (React + TS) · Driver app (React Native / Expo, Android) · one login, server-decided role, offline package</a:t>
             </a:r>
           </a:p>
           <a:p>
@@ -13599,7 +13599,7 @@
                 </a:solidFill>
                 <a:latin typeface="Calibri"/>
               </a:rPr>
-              <a:t>The whole lifecycle above was run end to end on a physical Android phone against the hosted backend, on the real Guwahati → Shillong road.</a:t>
+              <a:t>Run end to end on a physical Android phone, hosted backend, real road.</a:t>
             </a:r>
           </a:p>
         </p:txBody>
@@ -14002,7 +14002,7 @@
                 </a:solidFill>
                 <a:latin typeface="Calibri"/>
               </a:rPr>
-              <a:t>Every reroute on that run was approved by a manager before the phone followed it.</a:t>
+              <a:t>Every reroute approved by a manager before the phone followed it.</a:t>
             </a:r>
           </a:p>
         </p:txBody>
@@ -14088,7 +14088,7 @@
                 </a:solidFill>
                 <a:latin typeface="Calibri"/>
               </a:rPr>
-              <a:t>Render cold start → warm /health before the demo  ·  provider rate limits → cached evidence + explicit UNKNOWN  ·  background push needs Firebase config → in-app alerts already work  ·  experimental ML → outside routing until the gate passes</a:t>
+              <a:t>Cold start → warm /health first  ·  rate limits → cached evidence + explicit UNKNOWN  ·  push needs Firebase → in-app alerts work  ·  experimental ML → outside routing</a:t>
             </a:r>
           </a:p>
         </p:txBody>
@@ -14768,7 +14768,7 @@
                 </a:solidFill>
                 <a:latin typeface="Calibri"/>
               </a:rPr>
-              <a:t>Route usability and uncertainty visible before dispatch; auditable decisions.</a:t>
+              <a:t>Usability and uncertainty visible before dispatch. Auditable.</a:t>
             </a:r>
           </a:p>
         </p:txBody>
@@ -14864,7 +14864,7 @@
                 </a:solidFill>
                 <a:latin typeface="Calibri"/>
               </a:rPr>
-              <a:t>Safer navigation, danger context, emergency support, 23 languages.</a:t>
+              <a:t>Danger context, emergency support, 23 languages.</a:t>
             </a:r>
           </a:p>
         </p:txBody>
@@ -14960,7 +14960,7 @@
                 </a:solidFill>
                 <a:latin typeface="Calibri"/>
               </a:rPr>
-              <a:t>More resilient access to food, medicine, fuel and relief supplies.</a:t>
+              <a:t>Resilient access to food, medicine, fuel, relief.</a:t>
             </a:r>
           </a:p>
         </p:txBody>
@@ -15037,7 +15037,7 @@
                 </a:solidFill>
                 <a:latin typeface="Calibri"/>
               </a:rPr>
-              <a:t>GOVERNMENT / OPERATIONS</a:t>
+              <a:t>GOVERNMENT / OPS</a:t>
             </a:r>
           </a:p>
           <a:p>
@@ -15056,7 +15056,7 @@
                 </a:solidFill>
                 <a:latin typeface="Calibri"/>
               </a:rPr>
-              <a:t>Auditable route evidence and disruption visibility per corridor.</a:t>
+              <a:t>Auditable evidence and disruption per corridor.</a:t>
             </a:r>
           </a:p>
         </p:txBody>
@@ -16461,7 +16461,7 @@
                 </a:solidFill>
                 <a:latin typeface="Calibri"/>
               </a:rPr>
-              <a:t>Real screens, APK 1.0.18. One login, server-decided role: a manager gets a mobile fleet view, a driver gets navigation. Each language shows its status — Verified, Draft or English fallback — so nobody is misled.</a:t>
+              <a:t>APK 1.0.18. One login, server-decided role. Every language shows its status — Verified, Draft or English fallback.</a:t>
             </a:r>
           </a:p>
         </p:txBody>
@@ -17040,7 +17040,7 @@
                 </a:solidFill>
                 <a:latin typeface="Calibri"/>
               </a:rPr>
-              <a:t>real road geometry, alternatives and turn steps; place search on the corridor</a:t>
+              <a:t>Road geometry, alternatives, turn steps.</a:t>
             </a:r>
           </a:p>
         </p:txBody>
@@ -17155,7 +17155,7 @@
                 </a:solidFill>
                 <a:latin typeface="Calibri"/>
               </a:rPr>
-              <a:t>forecast sampled along the road; climb, gradient and steep segments (GLO-90)</a:t>
+              <a:t>Forecast along the road; climb, gradient, steep segments.</a:t>
             </a:r>
           </a:p>
         </p:txBody>
@@ -17270,7 +17270,7 @@
                 </a:solidFill>
                 <a:latin typeface="Calibri"/>
               </a:rPr>
-              <a:t>official warnings polled with freshness; river discharge against its 30-day mean</a:t>
+              <a:t>Official warnings with freshness; discharge vs 30-day mean.</a:t>
             </a:r>
           </a:p>
         </p:txBody>
@@ -17385,7 +17385,7 @@
                 </a:solidFill>
                 <a:latin typeface="Calibri"/>
               </a:rPr>
-              <a:t>historical exposure; inventory 2007–2017, ≤5 km location-accuracy filter</a:t>
+              <a:t>Historical exposure, 2007–2017, ≤5 km accuracy.</a:t>
             </a:r>
           </a:p>
         </p:txBody>
@@ -17500,7 +17500,7 @@
                 </a:solidFill>
                 <a:latin typeface="Calibri"/>
               </a:rPr>
-              <a:t>explains the decision in the driver's language — never safety authority</a:t>
+              <a:t>Explains in the driver's language. Never safety authority.</a:t>
             </a:r>
           </a:p>
         </p:txBody>
@@ -17615,7 +17615,7 @@
                 </a:solidFill>
                 <a:latin typeface="Calibri"/>
               </a:rPr>
-              <a:t>AI-based smart logistics and accessibility intelligence for the NER</a:t>
+              <a:t>Smart logistics and accessibility intelligence for the NER.</a:t>
             </a:r>
           </a:p>
         </p:txBody>
@@ -17806,7 +17806,7 @@
                 </a:solidFill>
                 <a:latin typeface="Calibri"/>
               </a:rPr>
-              <a:t>on the NER geographic holdout — 154 catalogued events, no NER row used in training</a:t>
+              <a:t>NER geographic holdout · 154 events · no NER row in training</a:t>
             </a:r>
           </a:p>
         </p:txBody>
@@ -18535,7 +18535,7 @@
                 </a:solidFill>
                 <a:latin typeface="Calibri"/>
               </a:rPr>
-              <a:t>Strong recall was not enough. Held-out testing exposed the false-positive rate, so the gate keeps the model out of routing.</a:t>
+              <a:t>Recall was not enough. Held-out testing exposed the false-positive rate. The gate keeps it out of routing.</a:t>
             </a:r>
           </a:p>
         </p:txBody>
@@ -18577,7 +18577,7 @@
                 </a:solidFill>
                 <a:latin typeface="Calibri"/>
               </a:rPr>
-              <a:t>Precision 0.32 · F1 0.48 · PR-AUC 0.55 · ROC-AUC 0.83 · Brier 0.12 · calibrated logistic regression on NASA GLC + ERA5-Land rain + DEM slope · docs/HAZARD_ERROR_ANALYSIS.md</a:t>
+              <a:t>Precision 0.32 · F1 0.48 · PR-AUC 0.55 · ROC-AUC 0.83 · Brier 0.12  —  calibrated logistic regression, NASA GLC + ERA5-Land rain + DEM slope</a:t>
             </a:r>
           </a:p>
         </p:txBody>
